--- a/atelier/atelier-x07-business-card-back.pptx
+++ b/atelier/atelier-x07-business-card-back.pptx
@@ -3140,7 +3140,7 @@
         </p:nvSpPr>
         <p:spPr>
           <a:xfrm>
-            <a:off x="4581525" y="1781175"/>
+            <a:off x="4581525" y="1846957"/>
             <a:ext cx="838200" cy="9525"/>
           </a:xfrm>
           <a:prstGeom prst="rect">
@@ -3184,7 +3184,7 @@
         </p:nvSpPr>
         <p:spPr>
           <a:xfrm>
-            <a:off x="4581525" y="2609850"/>
+            <a:off x="4581525" y="2675632"/>
             <a:ext cx="838200" cy="9525"/>
           </a:xfrm>
           <a:prstGeom prst="rect">
@@ -3228,7 +3228,7 @@
         </p:nvSpPr>
         <p:spPr>
           <a:xfrm>
-            <a:off x="4581525" y="1781175"/>
+            <a:off x="4581525" y="1846957"/>
             <a:ext cx="9525" cy="838200"/>
           </a:xfrm>
           <a:prstGeom prst="rect">
@@ -3272,7 +3272,7 @@
         </p:nvSpPr>
         <p:spPr>
           <a:xfrm>
-            <a:off x="5410200" y="1781175"/>
+            <a:off x="5410200" y="1846957"/>
             <a:ext cx="9525" cy="838200"/>
           </a:xfrm>
           <a:prstGeom prst="rect">
@@ -3316,7 +3316,7 @@
         </p:nvSpPr>
         <p:spPr>
           <a:xfrm>
-            <a:off x="4714875" y="3486150"/>
+            <a:off x="4714875" y="3464272"/>
             <a:ext cx="571500" cy="19050"/>
           </a:xfrm>
           <a:prstGeom prst="rect">
@@ -3360,7 +3360,7 @@
         </p:nvSpPr>
         <p:spPr>
           <a:xfrm>
-            <a:off x="4424839" y="2047875"/>
+            <a:off x="4424839" y="2113657"/>
             <a:ext cx="1151572" cy="304800"/>
           </a:xfrm>
           <a:prstGeom prst="rect">
@@ -3399,7 +3399,7 @@
         </p:nvSpPr>
         <p:spPr>
           <a:xfrm>
-            <a:off x="3361000" y="2838450"/>
+            <a:off x="3361000" y="2856607"/>
             <a:ext cx="1939052" cy="428625"/>
           </a:xfrm>
           <a:prstGeom prst="rect">
@@ -3411,7 +3411,11 @@
           <a:bodyPr wrap="none" anchor="t" lIns="0" rIns="0" tIns="0" bIns="0"/>
           <a:lstStyle/>
           <a:p>
-            <a:pPr algn="ctr"/>
+            <a:pPr algn="ctr">
+              <a:lnSpc>
+                <a:spcPct val="92000"/>
+              </a:lnSpc>
+            </a:pPr>
             <a:r>
               <a:rPr sz="3000" i="1" b="0">
                 <a:solidFill>
@@ -3434,7 +3438,7 @@
         </p:nvSpPr>
         <p:spPr>
           <a:xfrm>
-            <a:off x="4279999" y="2838450"/>
+            <a:off x="4279999" y="2856607"/>
             <a:ext cx="2457450" cy="419100"/>
           </a:xfrm>
           <a:prstGeom prst="rect">
@@ -3473,8 +3477,8 @@
         </p:nvSpPr>
         <p:spPr>
           <a:xfrm>
-            <a:off x="3307601" y="3714750"/>
-            <a:ext cx="3385899" cy="219075"/>
+            <a:off x="3307601" y="3692872"/>
+            <a:ext cx="3385899" cy="175171"/>
           </a:xfrm>
           <a:prstGeom prst="rect">
             <a:avLst/>
@@ -3485,7 +3489,11 @@
           <a:bodyPr wrap="none" anchor="t" lIns="0" rIns="0" tIns="0" bIns="0"/>
           <a:lstStyle/>
           <a:p>
-            <a:pPr algn="ctr"/>
+            <a:pPr algn="ctr">
+              <a:lnSpc>
+                <a:spcPct val="92000"/>
+              </a:lnSpc>
+            </a:pPr>
             <a:r>
               <a:rPr sz="1500" i="1" b="0">
                 <a:solidFill>
